--- a/img/Planos Edificiio 2 Piso.pptx
+++ b/img/Planos Edificiio 2 Piso.pptx
@@ -9,6 +9,7 @@
     <p:sldId id="257" r:id="rId3"/>
     <p:sldId id="258" r:id="rId4"/>
     <p:sldId id="259" r:id="rId5"/>
+    <p:sldId id="260" r:id="rId6"/>
   </p:sldIdLst>
   <p:sldSz cx="12192000" cy="6858000"/>
   <p:notesSz cx="6858000" cy="9144000"/>
@@ -118,7 +119,7 @@
 <file path=ppt/revisionInfo.xml><?xml version="1.0" encoding="utf-8"?>
 <p1510:revInfo xmlns:a="http://schemas.openxmlformats.org/drawingml/2006/main" xmlns:r="http://schemas.openxmlformats.org/officeDocument/2006/relationships" xmlns:p1510="http://schemas.microsoft.com/office/powerpoint/2015/10/main">
   <p1510:revLst>
-    <p1510:client id="{F69DC530-7EE7-417E-BDD7-8D86AAE01014}" v="1" dt="2024-01-18T15:59:54.424"/>
+    <p1510:client id="{F7E24971-6076-4762-B41E-5F171CF92651}" v="130" dt="2024-05-23T12:50:39.948"/>
   </p1510:revLst>
 </p1510:revInfo>
 </file>
@@ -4775,6 +4776,54 @@
             <ac:cxnSpMk id="177" creationId="{ABE8B49F-061C-28F5-A8A4-D241C2C4F691}"/>
           </ac:cxnSpMkLst>
         </pc:cxnChg>
+      </pc:sldChg>
+    </pc:docChg>
+  </pc:docChgLst>
+  <pc:docChgLst>
+    <pc:chgData name="Camayo Pesas Fabian Andres" userId="6c665825-f6d8-4921-b3fb-5149d9fbe4be" providerId="ADAL" clId="{F7E24971-6076-4762-B41E-5F171CF92651}"/>
+    <pc:docChg chg="undo custSel addSld modSld">
+      <pc:chgData name="Camayo Pesas Fabian Andres" userId="6c665825-f6d8-4921-b3fb-5149d9fbe4be" providerId="ADAL" clId="{F7E24971-6076-4762-B41E-5F171CF92651}" dt="2024-05-23T13:17:35.673" v="147" actId="1076"/>
+      <pc:docMkLst>
+        <pc:docMk/>
+      </pc:docMkLst>
+      <pc:sldChg chg="addSp delSp modSp new mod">
+        <pc:chgData name="Camayo Pesas Fabian Andres" userId="6c665825-f6d8-4921-b3fb-5149d9fbe4be" providerId="ADAL" clId="{F7E24971-6076-4762-B41E-5F171CF92651}" dt="2024-05-23T13:17:35.673" v="147" actId="1076"/>
+        <pc:sldMkLst>
+          <pc:docMk/>
+          <pc:sldMk cId="2642942292" sldId="260"/>
+        </pc:sldMkLst>
+        <pc:spChg chg="del">
+          <ac:chgData name="Camayo Pesas Fabian Andres" userId="6c665825-f6d8-4921-b3fb-5149d9fbe4be" providerId="ADAL" clId="{F7E24971-6076-4762-B41E-5F171CF92651}" dt="2024-05-23T12:45:07.631" v="2" actId="478"/>
+          <ac:spMkLst>
+            <pc:docMk/>
+            <pc:sldMk cId="2642942292" sldId="260"/>
+            <ac:spMk id="2" creationId="{E1E3676A-7C25-B909-ED70-0CA11E6D6FB8}"/>
+          </ac:spMkLst>
+        </pc:spChg>
+        <pc:spChg chg="del">
+          <ac:chgData name="Camayo Pesas Fabian Andres" userId="6c665825-f6d8-4921-b3fb-5149d9fbe4be" providerId="ADAL" clId="{F7E24971-6076-4762-B41E-5F171CF92651}" dt="2024-05-23T12:45:06.720" v="1" actId="478"/>
+          <ac:spMkLst>
+            <pc:docMk/>
+            <pc:sldMk cId="2642942292" sldId="260"/>
+            <ac:spMk id="3" creationId="{4571B66B-89FB-4A0D-B883-F57F05EFFDC0}"/>
+          </ac:spMkLst>
+        </pc:spChg>
+        <pc:picChg chg="add mod modCrop">
+          <ac:chgData name="Camayo Pesas Fabian Andres" userId="6c665825-f6d8-4921-b3fb-5149d9fbe4be" providerId="ADAL" clId="{F7E24971-6076-4762-B41E-5F171CF92651}" dt="2024-05-23T12:50:37.522" v="140" actId="732"/>
+          <ac:picMkLst>
+            <pc:docMk/>
+            <pc:sldMk cId="2642942292" sldId="260"/>
+            <ac:picMk id="5" creationId="{2EBBC2D5-8C57-548E-66A0-686167584E18}"/>
+          </ac:picMkLst>
+        </pc:picChg>
+        <pc:picChg chg="add mod modCrop">
+          <ac:chgData name="Camayo Pesas Fabian Andres" userId="6c665825-f6d8-4921-b3fb-5149d9fbe4be" providerId="ADAL" clId="{F7E24971-6076-4762-B41E-5F171CF92651}" dt="2024-05-23T13:17:35.673" v="147" actId="1076"/>
+          <ac:picMkLst>
+            <pc:docMk/>
+            <pc:sldMk cId="2642942292" sldId="260"/>
+            <ac:picMk id="6" creationId="{31F868FE-1E21-A675-3F40-BEBB7D7AB204}"/>
+          </ac:picMkLst>
+        </pc:picChg>
       </pc:sldChg>
     </pc:docChg>
   </pc:docChgLst>
@@ -4930,7 +4979,7 @@
           <a:p>
             <a:fld id="{716305BD-CF05-407E-B2BA-83EF0FFF2161}" type="datetimeFigureOut">
               <a:rPr lang="es-CO" smtClean="0"/>
-              <a:t>18/01/2024</a:t>
+              <a:t>23/05/2024</a:t>
             </a:fld>
             <a:endParaRPr lang="es-CO"/>
           </a:p>
@@ -5130,7 +5179,7 @@
           <a:p>
             <a:fld id="{716305BD-CF05-407E-B2BA-83EF0FFF2161}" type="datetimeFigureOut">
               <a:rPr lang="es-CO" smtClean="0"/>
-              <a:t>18/01/2024</a:t>
+              <a:t>23/05/2024</a:t>
             </a:fld>
             <a:endParaRPr lang="es-CO"/>
           </a:p>
@@ -5340,7 +5389,7 @@
           <a:p>
             <a:fld id="{716305BD-CF05-407E-B2BA-83EF0FFF2161}" type="datetimeFigureOut">
               <a:rPr lang="es-CO" smtClean="0"/>
-              <a:t>18/01/2024</a:t>
+              <a:t>23/05/2024</a:t>
             </a:fld>
             <a:endParaRPr lang="es-CO"/>
           </a:p>
@@ -5540,7 +5589,7 @@
           <a:p>
             <a:fld id="{716305BD-CF05-407E-B2BA-83EF0FFF2161}" type="datetimeFigureOut">
               <a:rPr lang="es-CO" smtClean="0"/>
-              <a:t>18/01/2024</a:t>
+              <a:t>23/05/2024</a:t>
             </a:fld>
             <a:endParaRPr lang="es-CO"/>
           </a:p>
@@ -5816,7 +5865,7 @@
           <a:p>
             <a:fld id="{716305BD-CF05-407E-B2BA-83EF0FFF2161}" type="datetimeFigureOut">
               <a:rPr lang="es-CO" smtClean="0"/>
-              <a:t>18/01/2024</a:t>
+              <a:t>23/05/2024</a:t>
             </a:fld>
             <a:endParaRPr lang="es-CO"/>
           </a:p>
@@ -6084,7 +6133,7 @@
           <a:p>
             <a:fld id="{716305BD-CF05-407E-B2BA-83EF0FFF2161}" type="datetimeFigureOut">
               <a:rPr lang="es-CO" smtClean="0"/>
-              <a:t>18/01/2024</a:t>
+              <a:t>23/05/2024</a:t>
             </a:fld>
             <a:endParaRPr lang="es-CO"/>
           </a:p>
@@ -6499,7 +6548,7 @@
           <a:p>
             <a:fld id="{716305BD-CF05-407E-B2BA-83EF0FFF2161}" type="datetimeFigureOut">
               <a:rPr lang="es-CO" smtClean="0"/>
-              <a:t>18/01/2024</a:t>
+              <a:t>23/05/2024</a:t>
             </a:fld>
             <a:endParaRPr lang="es-CO"/>
           </a:p>
@@ -6641,7 +6690,7 @@
           <a:p>
             <a:fld id="{716305BD-CF05-407E-B2BA-83EF0FFF2161}" type="datetimeFigureOut">
               <a:rPr lang="es-CO" smtClean="0"/>
-              <a:t>18/01/2024</a:t>
+              <a:t>23/05/2024</a:t>
             </a:fld>
             <a:endParaRPr lang="es-CO"/>
           </a:p>
@@ -6754,7 +6803,7 @@
           <a:p>
             <a:fld id="{716305BD-CF05-407E-B2BA-83EF0FFF2161}" type="datetimeFigureOut">
               <a:rPr lang="es-CO" smtClean="0"/>
-              <a:t>18/01/2024</a:t>
+              <a:t>23/05/2024</a:t>
             </a:fld>
             <a:endParaRPr lang="es-CO"/>
           </a:p>
@@ -7067,7 +7116,7 @@
           <a:p>
             <a:fld id="{716305BD-CF05-407E-B2BA-83EF0FFF2161}" type="datetimeFigureOut">
               <a:rPr lang="es-CO" smtClean="0"/>
-              <a:t>18/01/2024</a:t>
+              <a:t>23/05/2024</a:t>
             </a:fld>
             <a:endParaRPr lang="es-CO"/>
           </a:p>
@@ -7356,7 +7405,7 @@
           <a:p>
             <a:fld id="{716305BD-CF05-407E-B2BA-83EF0FFF2161}" type="datetimeFigureOut">
               <a:rPr lang="es-CO" smtClean="0"/>
-              <a:t>18/01/2024</a:t>
+              <a:t>23/05/2024</a:t>
             </a:fld>
             <a:endParaRPr lang="es-CO"/>
           </a:p>
@@ -7599,7 +7648,7 @@
           <a:p>
             <a:fld id="{716305BD-CF05-407E-B2BA-83EF0FFF2161}" type="datetimeFigureOut">
               <a:rPr lang="es-CO" smtClean="0"/>
-              <a:t>18/01/2024</a:t>
+              <a:t>23/05/2024</a:t>
             </a:fld>
             <a:endParaRPr lang="es-CO"/>
           </a:p>
@@ -23077,6 +23126,384 @@
 </p:sld>
 </file>
 
+<file path=ppt/slides/slide5.xml><?xml version="1.0" encoding="utf-8"?>
+<p:sld xmlns:a="http://schemas.openxmlformats.org/drawingml/2006/main" xmlns:r="http://schemas.openxmlformats.org/officeDocument/2006/relationships" xmlns:p="http://schemas.openxmlformats.org/presentationml/2006/main">
+  <p:cSld>
+    <p:spTree>
+      <p:nvGrpSpPr>
+        <p:cNvPr id="1" name=""/>
+        <p:cNvGrpSpPr/>
+        <p:nvPr/>
+      </p:nvGrpSpPr>
+      <p:grpSpPr>
+        <a:xfrm>
+          <a:off x="0" y="0"/>
+          <a:ext cx="0" cy="0"/>
+          <a:chOff x="0" y="0"/>
+          <a:chExt cx="0" cy="0"/>
+        </a:xfrm>
+      </p:grpSpPr>
+      <p:pic>
+        <p:nvPicPr>
+          <p:cNvPr id="5" name="Imagen 4" descr="Logotipo, nombre de la empresa&#10;&#10;Descripción generada automáticamente">
+            <a:extLst>
+              <a:ext uri="{FF2B5EF4-FFF2-40B4-BE49-F238E27FC236}">
+                <a16:creationId xmlns:a16="http://schemas.microsoft.com/office/drawing/2014/main" id="{2EBBC2D5-8C57-548E-66A0-686167584E18}"/>
+              </a:ext>
+            </a:extLst>
+          </p:cNvPr>
+          <p:cNvPicPr>
+            <a:picLocks noChangeAspect="1"/>
+          </p:cNvPicPr>
+          <p:nvPr/>
+        </p:nvPicPr>
+        <p:blipFill rotWithShape="1">
+          <a:blip r:embed="rId2">
+            <a:extLst>
+              <a:ext uri="{BEBA8EAE-BF5A-486C-A8C5-ECC9F3942E4B}">
+                <a14:imgProps xmlns:a14="http://schemas.microsoft.com/office/drawing/2010/main">
+                  <a14:imgLayer r:embed="rId3">
+                    <a14:imgEffect>
+                      <a14:backgroundRemoval t="1249" b="89947" l="1603" r="98974">
+                        <a14:foregroundMark x1="29112" y1="9179" x2="29112" y2="9179"/>
+                        <a14:foregroundMark x1="33633" y1="6400" x2="33633" y2="6400"/>
+                        <a14:foregroundMark x1="41648" y1="3278" x2="41648" y2="3278"/>
+                        <a14:foregroundMark x1="48766" y1="3028" x2="48766" y2="3028"/>
+                        <a14:foregroundMark x1="53415" y1="1249" x2="53415" y2="1249"/>
+                        <a14:foregroundMark x1="53415" y1="1249" x2="53415" y2="1249"/>
+                        <a14:foregroundMark x1="62712" y1="6806" x2="62712" y2="6806"/>
+                        <a14:foregroundMark x1="54954" y1="9179" x2="54954" y2="9179"/>
+                        <a14:foregroundMark x1="65662" y1="8804" x2="65662" y2="8804"/>
+                        <a14:foregroundMark x1="40109" y1="4777" x2="40109" y2="4777"/>
+                        <a14:foregroundMark x1="31196" y1="9179" x2="31196" y2="9179"/>
+                        <a14:foregroundMark x1="30266" y1="4402" x2="30266" y2="4402"/>
+                        <a14:foregroundMark x1="27573" y1="3278" x2="27573" y2="3278"/>
+                        <a14:foregroundMark x1="67874" y1="8554" x2="67874" y2="8554"/>
+                        <a14:foregroundMark x1="63097" y1="5901" x2="63097" y2="5901"/>
+                        <a14:foregroundMark x1="63867" y1="10553" x2="63867" y2="10553"/>
+                        <a14:foregroundMark x1="66848" y1="8430" x2="66848" y2="8430"/>
+                        <a14:foregroundMark x1="66848" y1="8430" x2="66848" y2="8430"/>
+                        <a14:foregroundMark x1="61141" y1="7306" x2="61141" y2="7306"/>
+                        <a14:foregroundMark x1="61013" y1="7306" x2="61013" y2="7306"/>
+                        <a14:foregroundMark x1="56492" y1="12582" x2="56492" y2="12582"/>
+                        <a14:foregroundMark x1="50946" y1="12582" x2="50946" y2="12582"/>
+                        <a14:foregroundMark x1="51459" y1="20887" x2="51459" y2="20887"/>
+                        <a14:foregroundMark x1="61783" y1="13081" x2="61783" y2="13081"/>
+                        <a14:foregroundMark x1="2501" y1="60256" x2="2501" y2="60256"/>
+                        <a14:foregroundMark x1="25617" y1="63409" x2="25617" y2="63409"/>
+                        <a14:foregroundMark x1="33889" y1="65782" x2="33889" y2="65782"/>
+                        <a14:foregroundMark x1="46810" y1="65283" x2="46810" y2="65283"/>
+                        <a14:foregroundMark x1="61783" y1="65407" x2="61783" y2="65407"/>
+                        <a14:foregroundMark x1="74319" y1="65532" x2="74319" y2="65532"/>
+                        <a14:foregroundMark x1="84001" y1="64908" x2="84001" y2="64908"/>
+                        <a14:foregroundMark x1="93459" y1="62754" x2="93459" y2="62754"/>
+                        <a14:foregroundMark x1="94101" y1="59007" x2="94101" y2="59007"/>
+                        <a14:foregroundMark x1="94357" y1="56978" x2="94357" y2="56978"/>
+                        <a14:foregroundMark x1="93331" y1="56853" x2="93331" y2="56853"/>
+                        <a14:foregroundMark x1="92401" y1="58601" x2="92401" y2="58601"/>
+                        <a14:foregroundMark x1="94101" y1="60756" x2="94101" y2="60756"/>
+                        <a14:foregroundMark x1="94229" y1="62879" x2="94229" y2="62879"/>
+                        <a14:foregroundMark x1="94229" y1="66531" x2="94229" y2="66531"/>
+                        <a14:foregroundMark x1="94357" y1="68311" x2="94357" y2="68311"/>
+                        <a14:foregroundMark x1="94357" y1="68561" x2="94485" y2="69310"/>
+                        <a14:foregroundMark x1="95127" y1="69685" x2="95127" y2="69685"/>
+                        <a14:foregroundMark x1="93716" y1="68311" x2="93716" y2="68311"/>
+                        <a14:foregroundMark x1="93716" y1="68061" x2="93716" y2="68061"/>
+                        <a14:foregroundMark x1="93716" y1="64533" x2="93716" y2="64533"/>
+                        <a14:foregroundMark x1="93972" y1="61630" x2="93972" y2="61630"/>
+                        <a14:foregroundMark x1="93972" y1="61630" x2="93972" y2="61630"/>
+                        <a14:foregroundMark x1="93972" y1="61630" x2="93972" y2="61630"/>
+                        <a14:foregroundMark x1="94614" y1="64034" x2="94614" y2="64034"/>
+                        <a14:foregroundMark x1="94485" y1="65907" x2="94485" y2="65907"/>
+                        <a14:foregroundMark x1="94485" y1="65907" x2="94485" y2="65907"/>
+                        <a14:foregroundMark x1="94485" y1="66157" x2="94485" y2="66781"/>
+                        <a14:foregroundMark x1="93844" y1="63160" x2="93844" y2="63160"/>
+                        <a14:foregroundMark x1="93844" y1="63160" x2="93844" y2="63659"/>
+                        <a14:foregroundMark x1="93844" y1="63784" x2="93844" y2="64283"/>
+                        <a14:foregroundMark x1="93844" y1="65033" x2="93844" y2="65407"/>
+                        <a14:foregroundMark x1="93844" y1="65532" x2="93844" y2="65532"/>
+                        <a14:foregroundMark x1="93844" y1="65782" x2="93844" y2="65782"/>
+                        <a14:foregroundMark x1="93844" y1="66032" x2="93844" y2="66032"/>
+                        <a14:foregroundMark x1="99006" y1="70434" x2="99006" y2="70434"/>
+                        <a14:foregroundMark x1="86983" y1="69185" x2="86983" y2="69185"/>
+                        <a14:foregroundMark x1="87239" y1="68561" x2="87496" y2="67687"/>
+                        <a14:foregroundMark x1="87624" y1="67031" x2="87624" y2="66656"/>
+                        <a14:foregroundMark x1="87624" y1="65782" x2="87624" y2="65782"/>
+                        <a14:foregroundMark x1="87624" y1="65782" x2="87624" y2="65782"/>
+                        <a14:foregroundMark x1="87624" y1="65782" x2="87624" y2="65782"/>
+                        <a14:foregroundMark x1="33761" y1="63659" x2="33761" y2="63659"/>
+                        <a14:foregroundMark x1="1603" y1="61630" x2="1603" y2="61630"/>
+                        <a14:foregroundMark x1="1731" y1="61879" x2="1731" y2="62379"/>
+                        <a14:foregroundMark x1="2244" y1="65657" x2="2244" y2="65657"/>
+                        <a14:foregroundMark x1="2501" y1="65907" x2="2501" y2="65907"/>
+                        <a14:foregroundMark x1="18916" y1="68061" x2="18916" y2="68061"/>
+                        <a14:foregroundMark x1="18916" y1="68061" x2="18916" y2="68061"/>
+                        <a14:foregroundMark x1="17890" y1="66282" x2="17890" y2="66282"/>
+                        <a14:foregroundMark x1="34017" y1="68561" x2="34017" y2="68561"/>
+                        <a14:foregroundMark x1="26419" y1="68810" x2="26419" y2="68810"/>
+                        <a14:foregroundMark x1="27701" y1="67281" x2="27701" y2="67281"/>
+                        <a14:foregroundMark x1="25745" y1="66406" x2="25745" y2="66406"/>
+                        <a14:foregroundMark x1="25745" y1="66406" x2="25745" y2="66406"/>
+                        <a14:foregroundMark x1="26002" y1="65657" x2="26002" y2="65657"/>
+                        <a14:foregroundMark x1="45399" y1="64283" x2="45399" y2="64283"/>
+                        <a14:foregroundMark x1="66464" y1="63659" x2="66464" y2="63659"/>
+                        <a14:foregroundMark x1="73934" y1="62504" x2="73934" y2="62504"/>
+                        <a14:foregroundMark x1="72139" y1="62379" x2="72139" y2="62379"/>
+                        <a14:foregroundMark x1="72139" y1="62379" x2="72139" y2="62379"/>
+                        <a14:foregroundMark x1="72139" y1="62379" x2="72139" y2="62379"/>
+                        <a14:foregroundMark x1="65406" y1="62879" x2="65406" y2="62879"/>
+                        <a14:foregroundMark x1="65406" y1="62879" x2="65406" y2="62879"/>
+                        <a14:foregroundMark x1="64251" y1="61255" x2="64251" y2="61255"/>
+                        <a14:foregroundMark x1="58961" y1="60381" x2="58448" y2="60381"/>
+                        <a14:foregroundMark x1="52228" y1="61380" x2="52228" y2="61380"/>
+                        <a14:foregroundMark x1="46040" y1="66282" x2="46040" y2="66282"/>
+                        <a14:foregroundMark x1="44501" y1="63284" x2="44501" y2="63284"/>
+                        <a14:foregroundMark x1="29625" y1="10178" x2="29625" y2="10178"/>
+                        <a14:foregroundMark x1="27829" y1="12082" x2="27829" y2="12082"/>
+                        <a14:foregroundMark x1="26803" y1="18732" x2="26803" y2="18732"/>
+                        <a14:foregroundMark x1="26803" y1="18732" x2="26803" y2="18732"/>
+                        <a14:foregroundMark x1="34530" y1="10553" x2="34530" y2="10553"/>
+                        <a14:foregroundMark x1="36486" y1="2123" x2="26900" y2="1499"/>
+                        <a14:foregroundMark x1="26900" y1="1499" x2="27316" y2="5276"/>
+                        <a14:foregroundMark x1="46169" y1="6806" x2="56621" y2="4839"/>
+                        <a14:foregroundMark x1="56621" y1="4839" x2="69445" y2="7087"/>
+                        <a14:foregroundMark x1="69445" y1="7087" x2="69029" y2="25788"/>
+                        <a14:foregroundMark x1="8047" y1="56728" x2="8047" y2="56728"/>
+                        <a14:foregroundMark x1="4970" y1="57852" x2="4970" y2="57852"/>
+                        <a14:foregroundMark x1="4072" y1="59881" x2="4072" y2="59881"/>
+                        <a14:foregroundMark x1="7021" y1="70559" x2="7021" y2="70559"/>
+                        <a14:foregroundMark x1="19558" y1="60256" x2="26451" y2="62317"/>
+                        <a14:foregroundMark x1="26451" y1="62317" x2="25297" y2="69716"/>
+                        <a14:foregroundMark x1="20540" y1="68367" x2="17698" y2="67562"/>
+                        <a14:foregroundMark x1="25297" y1="69716" x2="23816" y2="69296"/>
+                        <a14:foregroundMark x1="22633" y1="66111" x2="25874" y2="65158"/>
+                        <a14:foregroundMark x1="17698" y1="67562" x2="21533" y2="66434"/>
+                        <a14:foregroundMark x1="65406" y1="65033" x2="57903" y2="66500"/>
+                        <a14:foregroundMark x1="57903" y1="66500" x2="60316" y2="67996"/>
+                        <a14:foregroundMark x1="63995" y1="70278" x2="66047" y2="64034"/>
+                        <a14:backgroundMark x1="22539" y1="68810" x2="22539" y2="68810"/>
+                        <a14:backgroundMark x1="23181" y1="67031" x2="23822" y2="67281"/>
+                        <a14:backgroundMark x1="62071" y1="69185" x2="60115" y2="68186"/>
+                        <a14:backgroundMark x1="62712" y1="69060" x2="61943" y2="69310"/>
+                        <a14:backgroundMark x1="59602" y1="67562" x2="60372" y2="67936"/>
+                        <a14:backgroundMark x1="23181" y1="66157" x2="23309" y2="69185"/>
+                        <a14:backgroundMark x1="21353" y1="67562" x2="21481" y2="68186"/>
+                        <a14:backgroundMark x1="22411" y1="66531" x2="21097" y2="66906"/>
+                        <a14:backgroundMark x1="20584" y1="68436" x2="23052" y2="69185"/>
+                        <a14:backgroundMark x1="23437" y1="69185" x2="23950" y2="69060"/>
+                        <a14:backgroundMark x1="20584" y1="68686" x2="20199" y2="68061"/>
+                        <a14:backgroundMark x1="20712" y1="66906" x2="21225" y2="66906"/>
+                        <a14:backgroundMark x1="22924" y1="66406" x2="22924" y2="66406"/>
+                      </a14:backgroundRemoval>
+                    </a14:imgEffect>
+                  </a14:imgLayer>
+                </a14:imgProps>
+              </a:ext>
+              <a:ext uri="{28A0092B-C50C-407E-A947-70E740481C1C}">
+                <a14:useLocalDpi xmlns:a14="http://schemas.microsoft.com/office/drawing/2010/main" val="0"/>
+              </a:ext>
+            </a:extLst>
+          </a:blip>
+          <a:srcRect b="23648"/>
+          <a:stretch/>
+        </p:blipFill>
+        <p:spPr>
+          <a:xfrm>
+            <a:off x="3690992" y="1699404"/>
+            <a:ext cx="2112360" cy="1656270"/>
+          </a:xfrm>
+          <a:prstGeom prst="rect">
+            <a:avLst/>
+          </a:prstGeom>
+        </p:spPr>
+      </p:pic>
+      <p:pic>
+        <p:nvPicPr>
+          <p:cNvPr id="6" name="Imagen 5" descr="Logotipo, nombre de la empresa&#10;&#10;Descripción generada automáticamente">
+            <a:extLst>
+              <a:ext uri="{FF2B5EF4-FFF2-40B4-BE49-F238E27FC236}">
+                <a16:creationId xmlns:a16="http://schemas.microsoft.com/office/drawing/2014/main" id="{31F868FE-1E21-A675-3F40-BEBB7D7AB204}"/>
+              </a:ext>
+            </a:extLst>
+          </p:cNvPr>
+          <p:cNvPicPr>
+            <a:picLocks noChangeAspect="1"/>
+          </p:cNvPicPr>
+          <p:nvPr/>
+        </p:nvPicPr>
+        <p:blipFill rotWithShape="1">
+          <a:blip r:embed="rId2">
+            <a:extLst>
+              <a:ext uri="{BEBA8EAE-BF5A-486C-A8C5-ECC9F3942E4B}">
+                <a14:imgProps xmlns:a14="http://schemas.microsoft.com/office/drawing/2010/main">
+                  <a14:imgLayer r:embed="rId3">
+                    <a14:imgEffect>
+                      <a14:backgroundRemoval t="1249" b="89947" l="1603" r="98974">
+                        <a14:foregroundMark x1="29112" y1="9179" x2="29112" y2="9179"/>
+                        <a14:foregroundMark x1="33633" y1="6400" x2="33633" y2="6400"/>
+                        <a14:foregroundMark x1="41648" y1="3278" x2="41648" y2="3278"/>
+                        <a14:foregroundMark x1="48766" y1="3028" x2="48766" y2="3028"/>
+                        <a14:foregroundMark x1="53415" y1="1249" x2="53415" y2="1249"/>
+                        <a14:foregroundMark x1="53415" y1="1249" x2="53415" y2="1249"/>
+                        <a14:foregroundMark x1="62712" y1="6806" x2="62712" y2="6806"/>
+                        <a14:foregroundMark x1="54954" y1="9179" x2="54954" y2="9179"/>
+                        <a14:foregroundMark x1="65662" y1="8804" x2="65662" y2="8804"/>
+                        <a14:foregroundMark x1="40109" y1="4777" x2="40109" y2="4777"/>
+                        <a14:foregroundMark x1="31196" y1="9179" x2="31196" y2="9179"/>
+                        <a14:foregroundMark x1="30266" y1="4402" x2="30266" y2="4402"/>
+                        <a14:foregroundMark x1="27573" y1="3278" x2="27573" y2="3278"/>
+                        <a14:foregroundMark x1="67874" y1="8554" x2="67874" y2="8554"/>
+                        <a14:foregroundMark x1="63097" y1="5901" x2="63097" y2="5901"/>
+                        <a14:foregroundMark x1="63867" y1="10553" x2="63867" y2="10553"/>
+                        <a14:foregroundMark x1="66848" y1="8430" x2="66848" y2="8430"/>
+                        <a14:foregroundMark x1="66848" y1="8430" x2="66848" y2="8430"/>
+                        <a14:foregroundMark x1="61141" y1="7306" x2="61141" y2="7306"/>
+                        <a14:foregroundMark x1="61013" y1="7306" x2="61013" y2="7306"/>
+                        <a14:foregroundMark x1="56492" y1="12582" x2="56492" y2="12582"/>
+                        <a14:foregroundMark x1="50946" y1="12582" x2="50946" y2="12582"/>
+                        <a14:foregroundMark x1="51459" y1="20887" x2="51459" y2="20887"/>
+                        <a14:foregroundMark x1="61783" y1="13081" x2="61783" y2="13081"/>
+                        <a14:foregroundMark x1="2501" y1="60256" x2="2501" y2="60256"/>
+                        <a14:foregroundMark x1="25617" y1="63409" x2="25617" y2="63409"/>
+                        <a14:foregroundMark x1="33889" y1="65782" x2="33889" y2="65782"/>
+                        <a14:foregroundMark x1="46810" y1="65283" x2="46810" y2="65283"/>
+                        <a14:foregroundMark x1="61783" y1="65407" x2="61783" y2="65407"/>
+                        <a14:foregroundMark x1="74319" y1="65532" x2="74319" y2="65532"/>
+                        <a14:foregroundMark x1="84001" y1="64908" x2="84001" y2="64908"/>
+                        <a14:foregroundMark x1="93459" y1="62754" x2="93459" y2="62754"/>
+                        <a14:foregroundMark x1="94101" y1="59007" x2="94101" y2="59007"/>
+                        <a14:foregroundMark x1="94357" y1="56978" x2="94357" y2="56978"/>
+                        <a14:foregroundMark x1="93331" y1="56853" x2="93331" y2="56853"/>
+                        <a14:foregroundMark x1="92401" y1="58601" x2="92401" y2="58601"/>
+                        <a14:foregroundMark x1="94101" y1="60756" x2="94101" y2="60756"/>
+                        <a14:foregroundMark x1="94229" y1="62879" x2="94229" y2="62879"/>
+                        <a14:foregroundMark x1="94229" y1="66531" x2="94229" y2="66531"/>
+                        <a14:foregroundMark x1="94357" y1="68311" x2="94357" y2="68311"/>
+                        <a14:foregroundMark x1="94357" y1="68561" x2="94485" y2="69310"/>
+                        <a14:foregroundMark x1="95127" y1="69685" x2="95127" y2="69685"/>
+                        <a14:foregroundMark x1="93716" y1="68311" x2="93716" y2="68311"/>
+                        <a14:foregroundMark x1="93716" y1="68061" x2="93716" y2="68061"/>
+                        <a14:foregroundMark x1="93716" y1="64533" x2="93716" y2="64533"/>
+                        <a14:foregroundMark x1="93972" y1="61630" x2="93972" y2="61630"/>
+                        <a14:foregroundMark x1="93972" y1="61630" x2="93972" y2="61630"/>
+                        <a14:foregroundMark x1="93972" y1="61630" x2="93972" y2="61630"/>
+                        <a14:foregroundMark x1="94614" y1="64034" x2="94614" y2="64034"/>
+                        <a14:foregroundMark x1="94485" y1="65907" x2="94485" y2="65907"/>
+                        <a14:foregroundMark x1="94485" y1="65907" x2="94485" y2="65907"/>
+                        <a14:foregroundMark x1="94485" y1="66157" x2="94485" y2="66781"/>
+                        <a14:foregroundMark x1="93844" y1="63160" x2="93844" y2="63160"/>
+                        <a14:foregroundMark x1="93844" y1="63160" x2="93844" y2="63659"/>
+                        <a14:foregroundMark x1="93844" y1="63784" x2="93844" y2="64283"/>
+                        <a14:foregroundMark x1="93844" y1="65033" x2="93844" y2="65407"/>
+                        <a14:foregroundMark x1="93844" y1="65532" x2="93844" y2="65532"/>
+                        <a14:foregroundMark x1="93844" y1="65782" x2="93844" y2="65782"/>
+                        <a14:foregroundMark x1="93844" y1="66032" x2="93844" y2="66032"/>
+                        <a14:foregroundMark x1="99006" y1="70434" x2="99006" y2="70434"/>
+                        <a14:foregroundMark x1="86983" y1="69185" x2="86983" y2="69185"/>
+                        <a14:foregroundMark x1="87239" y1="68561" x2="87496" y2="67687"/>
+                        <a14:foregroundMark x1="87624" y1="67031" x2="87624" y2="66656"/>
+                        <a14:foregroundMark x1="87624" y1="65782" x2="87624" y2="65782"/>
+                        <a14:foregroundMark x1="87624" y1="65782" x2="87624" y2="65782"/>
+                        <a14:foregroundMark x1="87624" y1="65782" x2="87624" y2="65782"/>
+                        <a14:foregroundMark x1="33761" y1="63659" x2="33761" y2="63659"/>
+                        <a14:foregroundMark x1="1603" y1="61630" x2="1603" y2="61630"/>
+                        <a14:foregroundMark x1="1731" y1="61879" x2="1731" y2="62379"/>
+                        <a14:foregroundMark x1="2244" y1="65657" x2="2244" y2="65657"/>
+                        <a14:foregroundMark x1="2501" y1="65907" x2="2501" y2="65907"/>
+                        <a14:foregroundMark x1="18916" y1="68061" x2="18916" y2="68061"/>
+                        <a14:foregroundMark x1="18916" y1="68061" x2="18916" y2="68061"/>
+                        <a14:foregroundMark x1="17890" y1="66282" x2="17890" y2="66282"/>
+                        <a14:foregroundMark x1="34017" y1="68561" x2="34017" y2="68561"/>
+                        <a14:foregroundMark x1="26419" y1="68810" x2="26419" y2="68810"/>
+                        <a14:foregroundMark x1="27701" y1="67281" x2="27701" y2="67281"/>
+                        <a14:foregroundMark x1="25745" y1="66406" x2="25745" y2="66406"/>
+                        <a14:foregroundMark x1="25745" y1="66406" x2="25745" y2="66406"/>
+                        <a14:foregroundMark x1="26002" y1="65657" x2="26002" y2="65657"/>
+                        <a14:foregroundMark x1="45399" y1="64283" x2="45399" y2="64283"/>
+                        <a14:foregroundMark x1="66464" y1="63659" x2="66464" y2="63659"/>
+                        <a14:foregroundMark x1="73934" y1="62504" x2="73934" y2="62504"/>
+                        <a14:foregroundMark x1="72139" y1="62379" x2="72139" y2="62379"/>
+                        <a14:foregroundMark x1="72139" y1="62379" x2="72139" y2="62379"/>
+                        <a14:foregroundMark x1="72139" y1="62379" x2="72139" y2="62379"/>
+                        <a14:foregroundMark x1="65406" y1="62879" x2="65406" y2="62879"/>
+                        <a14:foregroundMark x1="65406" y1="62879" x2="65406" y2="62879"/>
+                        <a14:foregroundMark x1="64251" y1="61255" x2="64251" y2="61255"/>
+                        <a14:foregroundMark x1="58961" y1="60381" x2="58448" y2="60381"/>
+                        <a14:foregroundMark x1="52228" y1="61380" x2="52228" y2="61380"/>
+                        <a14:foregroundMark x1="46040" y1="66282" x2="46040" y2="66282"/>
+                        <a14:foregroundMark x1="44501" y1="63284" x2="44501" y2="63284"/>
+                        <a14:foregroundMark x1="29625" y1="10178" x2="29625" y2="10178"/>
+                        <a14:foregroundMark x1="27829" y1="12082" x2="27829" y2="12082"/>
+                        <a14:foregroundMark x1="26803" y1="18732" x2="26803" y2="18732"/>
+                        <a14:foregroundMark x1="26803" y1="18732" x2="26803" y2="18732"/>
+                        <a14:foregroundMark x1="34530" y1="10553" x2="34530" y2="10553"/>
+                        <a14:foregroundMark x1="36486" y1="2123" x2="26900" y2="1499"/>
+                        <a14:foregroundMark x1="26900" y1="1499" x2="27316" y2="5276"/>
+                        <a14:foregroundMark x1="46169" y1="6806" x2="56621" y2="4839"/>
+                        <a14:foregroundMark x1="56621" y1="4839" x2="69445" y2="7087"/>
+                        <a14:foregroundMark x1="69445" y1="7087" x2="69029" y2="25788"/>
+                        <a14:foregroundMark x1="8047" y1="56728" x2="8047" y2="56728"/>
+                        <a14:foregroundMark x1="4970" y1="57852" x2="4970" y2="57852"/>
+                        <a14:foregroundMark x1="4072" y1="59881" x2="4072" y2="59881"/>
+                        <a14:foregroundMark x1="7021" y1="70559" x2="7021" y2="70559"/>
+                        <a14:foregroundMark x1="19558" y1="60256" x2="26451" y2="62317"/>
+                        <a14:foregroundMark x1="26451" y1="62317" x2="25297" y2="69716"/>
+                        <a14:foregroundMark x1="20540" y1="68367" x2="17698" y2="67562"/>
+                        <a14:foregroundMark x1="25297" y1="69716" x2="23816" y2="69296"/>
+                        <a14:foregroundMark x1="22633" y1="66111" x2="25874" y2="65158"/>
+                        <a14:foregroundMark x1="17698" y1="67562" x2="21533" y2="66434"/>
+                        <a14:foregroundMark x1="65406" y1="65033" x2="57903" y2="66500"/>
+                        <a14:foregroundMark x1="57903" y1="66500" x2="60316" y2="67996"/>
+                        <a14:foregroundMark x1="63995" y1="70278" x2="66047" y2="64034"/>
+                        <a14:backgroundMark x1="22539" y1="68810" x2="22539" y2="68810"/>
+                        <a14:backgroundMark x1="23181" y1="67031" x2="23822" y2="67281"/>
+                        <a14:backgroundMark x1="62071" y1="69185" x2="60115" y2="68186"/>
+                        <a14:backgroundMark x1="62712" y1="69060" x2="61943" y2="69310"/>
+                        <a14:backgroundMark x1="59602" y1="67562" x2="60372" y2="67936"/>
+                        <a14:backgroundMark x1="23181" y1="66157" x2="23309" y2="69185"/>
+                        <a14:backgroundMark x1="21353" y1="67562" x2="21481" y2="68186"/>
+                        <a14:backgroundMark x1="22411" y1="66531" x2="21097" y2="66906"/>
+                        <a14:backgroundMark x1="20584" y1="68436" x2="23052" y2="69185"/>
+                        <a14:backgroundMark x1="23437" y1="69185" x2="23950" y2="69060"/>
+                        <a14:backgroundMark x1="20584" y1="68686" x2="20199" y2="68061"/>
+                        <a14:backgroundMark x1="20712" y1="66906" x2="21225" y2="66906"/>
+                        <a14:backgroundMark x1="22924" y1="66406" x2="22924" y2="66406"/>
+                      </a14:backgroundRemoval>
+                    </a14:imgEffect>
+                  </a14:imgLayer>
+                </a14:imgProps>
+              </a:ext>
+              <a:ext uri="{28A0092B-C50C-407E-A947-70E740481C1C}">
+                <a14:useLocalDpi xmlns:a14="http://schemas.microsoft.com/office/drawing/2010/main" val="0"/>
+              </a:ext>
+            </a:extLst>
+          </a:blip>
+          <a:srcRect l="21563" r="24655" b="50179"/>
+          <a:stretch/>
+        </p:blipFill>
+        <p:spPr>
+          <a:xfrm>
+            <a:off x="8211126" y="1893368"/>
+            <a:ext cx="1136073" cy="1080741"/>
+          </a:xfrm>
+          <a:prstGeom prst="rect">
+            <a:avLst/>
+          </a:prstGeom>
+        </p:spPr>
+      </p:pic>
+    </p:spTree>
+    <p:extLst>
+      <p:ext uri="{BB962C8B-B14F-4D97-AF65-F5344CB8AC3E}">
+        <p14:creationId xmlns:p14="http://schemas.microsoft.com/office/powerpoint/2010/main" val="2642942292"/>
+      </p:ext>
+    </p:extLst>
+  </p:cSld>
+  <p:clrMapOvr>
+    <a:masterClrMapping/>
+  </p:clrMapOvr>
+</p:sld>
+</file>
+
 <file path=ppt/theme/theme1.xml><?xml version="1.0" encoding="utf-8"?>
 <a:theme xmlns:a="http://schemas.openxmlformats.org/drawingml/2006/main" name="Tema de Office">
   <a:themeElements>
